--- a/Zeitplan.pptx
+++ b/Zeitplan.pptx
@@ -8,7 +8,7 @@
     <p:sldId id="257" r:id="rId2"/>
   </p:sldIdLst>
   <p:sldSz cx="12192000" cy="6858000"/>
-  <p:notesSz cx="6858000" cy="9144000"/>
+  <p:notesSz cx="7104063" cy="10234613"/>
   <p:defaultTextStyle>
     <a:defPPr>
       <a:defRPr lang="de-DE"/>
@@ -115,7 +115,7 @@
 <file path=ppt/revisionInfo.xml><?xml version="1.0" encoding="utf-8"?>
 <p1510:revInfo xmlns:a="http://schemas.openxmlformats.org/drawingml/2006/main" xmlns:r="http://schemas.openxmlformats.org/officeDocument/2006/relationships" xmlns:p1510="http://schemas.microsoft.com/office/powerpoint/2015/10/main">
   <p1510:revLst>
-    <p1510:client id="{1401CEA7-3E6D-48BE-BF7F-EA8FBA86DA99}" v="21" dt="2026-07-08T06:26:35.761"/>
+    <p1510:client id="{6E0490E4-8C9F-42ED-82AC-02538E04217A}" v="4" dt="2026-08-05T09:16:55.212"/>
   </p1510:revLst>
 </p1510:revInfo>
 </file>
@@ -125,74 +125,18 @@
   <pc:docChgLst>
     <pc:chgData name="Nuber, Nathalie" userId="64826a5e-75fc-44e6-a073-417b106d7220" providerId="ADAL" clId="{2D240D19-45E2-4320-A1B7-FEF1D055401D}"/>
     <pc:docChg chg="undo custSel mod addSld delSld modSld modMainMaster">
-      <pc:chgData name="Nuber, Nathalie" userId="64826a5e-75fc-44e6-a073-417b106d7220" providerId="ADAL" clId="{2D240D19-45E2-4320-A1B7-FEF1D055401D}" dt="2026-07-08T06:27:30.983" v="577" actId="1076"/>
+      <pc:chgData name="Nuber, Nathalie" userId="64826a5e-75fc-44e6-a073-417b106d7220" providerId="ADAL" clId="{2D240D19-45E2-4320-A1B7-FEF1D055401D}" dt="2026-08-05T09:18:07.912" v="767" actId="20577"/>
       <pc:docMkLst>
         <pc:docMk/>
       </pc:docMkLst>
       <pc:sldChg chg="addSp delSp modSp mod setBg">
-        <pc:chgData name="Nuber, Nathalie" userId="64826a5e-75fc-44e6-a073-417b106d7220" providerId="ADAL" clId="{2D240D19-45E2-4320-A1B7-FEF1D055401D}" dt="2026-07-08T06:27:30.983" v="577" actId="1076"/>
+        <pc:chgData name="Nuber, Nathalie" userId="64826a5e-75fc-44e6-a073-417b106d7220" providerId="ADAL" clId="{2D240D19-45E2-4320-A1B7-FEF1D055401D}" dt="2026-08-05T09:18:07.912" v="767" actId="20577"/>
         <pc:sldMkLst>
           <pc:docMk/>
           <pc:sldMk cId="3760044697" sldId="257"/>
         </pc:sldMkLst>
-        <pc:spChg chg="del">
-          <ac:chgData name="Nuber, Nathalie" userId="64826a5e-75fc-44e6-a073-417b106d7220" providerId="ADAL" clId="{2D240D19-45E2-4320-A1B7-FEF1D055401D}" dt="2026-07-08T06:21:05.500" v="422" actId="478"/>
-          <ac:spMkLst>
-            <pc:docMk/>
-            <pc:sldMk cId="3760044697" sldId="257"/>
-            <ac:spMk id="8" creationId="{00000000-0000-0000-0000-000000000000}"/>
-          </ac:spMkLst>
-        </pc:spChg>
-        <pc:spChg chg="del">
-          <ac:chgData name="Nuber, Nathalie" userId="64826a5e-75fc-44e6-a073-417b106d7220" providerId="ADAL" clId="{2D240D19-45E2-4320-A1B7-FEF1D055401D}" dt="2026-07-08T06:21:06.494" v="423" actId="478"/>
-          <ac:spMkLst>
-            <pc:docMk/>
-            <pc:sldMk cId="3760044697" sldId="257"/>
-            <ac:spMk id="9" creationId="{00000000-0000-0000-0000-000000000000}"/>
-          </ac:spMkLst>
-        </pc:spChg>
-        <pc:spChg chg="del">
-          <ac:chgData name="Nuber, Nathalie" userId="64826a5e-75fc-44e6-a073-417b106d7220" providerId="ADAL" clId="{2D240D19-45E2-4320-A1B7-FEF1D055401D}" dt="2026-07-08T06:21:23.229" v="431" actId="478"/>
-          <ac:spMkLst>
-            <pc:docMk/>
-            <pc:sldMk cId="3760044697" sldId="257"/>
-            <ac:spMk id="10" creationId="{00000000-0000-0000-0000-000000000000}"/>
-          </ac:spMkLst>
-        </pc:spChg>
-        <pc:spChg chg="del">
-          <ac:chgData name="Nuber, Nathalie" userId="64826a5e-75fc-44e6-a073-417b106d7220" providerId="ADAL" clId="{2D240D19-45E2-4320-A1B7-FEF1D055401D}" dt="2026-07-08T06:21:13.743" v="429" actId="478"/>
-          <ac:spMkLst>
-            <pc:docMk/>
-            <pc:sldMk cId="3760044697" sldId="257"/>
-            <ac:spMk id="11" creationId="{00000000-0000-0000-0000-000000000000}"/>
-          </ac:spMkLst>
-        </pc:spChg>
         <pc:spChg chg="add del mod">
-          <ac:chgData name="Nuber, Nathalie" userId="64826a5e-75fc-44e6-a073-417b106d7220" providerId="ADAL" clId="{2D240D19-45E2-4320-A1B7-FEF1D055401D}" dt="2026-07-07T14:20:22.922" v="203" actId="478"/>
-          <ac:spMkLst>
-            <pc:docMk/>
-            <pc:sldMk cId="3760044697" sldId="257"/>
-            <ac:spMk id="11" creationId="{09610BCE-8BF2-D799-5428-8BB2BFA28956}"/>
-          </ac:spMkLst>
-        </pc:spChg>
-        <pc:spChg chg="del">
-          <ac:chgData name="Nuber, Nathalie" userId="64826a5e-75fc-44e6-a073-417b106d7220" providerId="ADAL" clId="{2D240D19-45E2-4320-A1B7-FEF1D055401D}" dt="2026-07-08T06:21:27.980" v="433" actId="478"/>
-          <ac:spMkLst>
-            <pc:docMk/>
-            <pc:sldMk cId="3760044697" sldId="257"/>
-            <ac:spMk id="12" creationId="{00000000-0000-0000-0000-000000000000}"/>
-          </ac:spMkLst>
-        </pc:spChg>
-        <pc:spChg chg="del">
-          <ac:chgData name="Nuber, Nathalie" userId="64826a5e-75fc-44e6-a073-417b106d7220" providerId="ADAL" clId="{2D240D19-45E2-4320-A1B7-FEF1D055401D}" dt="2026-07-08T06:20:51.293" v="419" actId="478"/>
-          <ac:spMkLst>
-            <pc:docMk/>
-            <pc:sldMk cId="3760044697" sldId="257"/>
-            <ac:spMk id="13" creationId="{00000000-0000-0000-0000-000000000000}"/>
-          </ac:spMkLst>
-        </pc:spChg>
-        <pc:spChg chg="add del mod">
-          <ac:chgData name="Nuber, Nathalie" userId="64826a5e-75fc-44e6-a073-417b106d7220" providerId="ADAL" clId="{2D240D19-45E2-4320-A1B7-FEF1D055401D}" dt="2026-07-08T06:22:14.509" v="474" actId="20577"/>
+          <ac:chgData name="Nuber, Nathalie" userId="64826a5e-75fc-44e6-a073-417b106d7220" providerId="ADAL" clId="{2D240D19-45E2-4320-A1B7-FEF1D055401D}" dt="2026-08-05T09:09:10.931" v="632" actId="1076"/>
           <ac:spMkLst>
             <pc:docMk/>
             <pc:sldMk cId="3760044697" sldId="257"/>
@@ -336,7 +280,7 @@
           </ac:spMkLst>
         </pc:spChg>
         <pc:spChg chg="mod">
-          <ac:chgData name="Nuber, Nathalie" userId="64826a5e-75fc-44e6-a073-417b106d7220" providerId="ADAL" clId="{2D240D19-45E2-4320-A1B7-FEF1D055401D}" dt="2026-07-08T06:16:05.647" v="314" actId="1036"/>
+          <ac:chgData name="Nuber, Nathalie" userId="64826a5e-75fc-44e6-a073-417b106d7220" providerId="ADAL" clId="{2D240D19-45E2-4320-A1B7-FEF1D055401D}" dt="2026-08-05T09:02:47.192" v="578" actId="26606"/>
           <ac:spMkLst>
             <pc:docMk/>
             <pc:sldMk cId="3760044697" sldId="257"/>
@@ -344,7 +288,7 @@
           </ac:spMkLst>
         </pc:spChg>
         <pc:spChg chg="mod">
-          <ac:chgData name="Nuber, Nathalie" userId="64826a5e-75fc-44e6-a073-417b106d7220" providerId="ADAL" clId="{2D240D19-45E2-4320-A1B7-FEF1D055401D}" dt="2026-07-08T06:16:05.647" v="314" actId="1036"/>
+          <ac:chgData name="Nuber, Nathalie" userId="64826a5e-75fc-44e6-a073-417b106d7220" providerId="ADAL" clId="{2D240D19-45E2-4320-A1B7-FEF1D055401D}" dt="2026-08-05T09:02:47.192" v="578" actId="26606"/>
           <ac:spMkLst>
             <pc:docMk/>
             <pc:sldMk cId="3760044697" sldId="257"/>
@@ -357,14 +301,6 @@
             <pc:docMk/>
             <pc:sldMk cId="3760044697" sldId="257"/>
             <ac:spMk id="64" creationId="{00000000-0000-0000-0000-000000000000}"/>
-          </ac:spMkLst>
-        </pc:spChg>
-        <pc:spChg chg="del mod">
-          <ac:chgData name="Nuber, Nathalie" userId="64826a5e-75fc-44e6-a073-417b106d7220" providerId="ADAL" clId="{2D240D19-45E2-4320-A1B7-FEF1D055401D}" dt="2026-07-08T06:24:15.707" v="496" actId="478"/>
-          <ac:spMkLst>
-            <pc:docMk/>
-            <pc:sldMk cId="3760044697" sldId="257"/>
-            <ac:spMk id="66" creationId="{00000000-0000-0000-0000-000000000000}"/>
           </ac:spMkLst>
         </pc:spChg>
         <pc:spChg chg="mod">
@@ -424,7 +360,7 @@
           </ac:spMkLst>
         </pc:spChg>
         <pc:spChg chg="mod">
-          <ac:chgData name="Nuber, Nathalie" userId="64826a5e-75fc-44e6-a073-417b106d7220" providerId="ADAL" clId="{2D240D19-45E2-4320-A1B7-FEF1D055401D}" dt="2026-07-08T06:25:06.126" v="501" actId="20577"/>
+          <ac:chgData name="Nuber, Nathalie" userId="64826a5e-75fc-44e6-a073-417b106d7220" providerId="ADAL" clId="{2D240D19-45E2-4320-A1B7-FEF1D055401D}" dt="2026-08-05T09:02:47.192" v="578" actId="26606"/>
           <ac:spMkLst>
             <pc:docMk/>
             <pc:sldMk cId="3760044697" sldId="257"/>
@@ -432,7 +368,7 @@
           </ac:spMkLst>
         </pc:spChg>
         <pc:spChg chg="add mod">
-          <ac:chgData name="Nuber, Nathalie" userId="64826a5e-75fc-44e6-a073-417b106d7220" providerId="ADAL" clId="{2D240D19-45E2-4320-A1B7-FEF1D055401D}" dt="2026-07-08T06:25:09.748" v="502" actId="1076"/>
+          <ac:chgData name="Nuber, Nathalie" userId="64826a5e-75fc-44e6-a073-417b106d7220" providerId="ADAL" clId="{2D240D19-45E2-4320-A1B7-FEF1D055401D}" dt="2026-08-05T09:02:47.192" v="578" actId="26606"/>
           <ac:spMkLst>
             <pc:docMk/>
             <pc:sldMk cId="3760044697" sldId="257"/>
@@ -448,75 +384,11 @@
           </ac:spMkLst>
         </pc:spChg>
         <pc:spChg chg="mod">
-          <ac:chgData name="Nuber, Nathalie" userId="64826a5e-75fc-44e6-a073-417b106d7220" providerId="ADAL" clId="{2D240D19-45E2-4320-A1B7-FEF1D055401D}" dt="2026-07-08T06:24:26.235" v="498"/>
+          <ac:chgData name="Nuber, Nathalie" userId="64826a5e-75fc-44e6-a073-417b106d7220" providerId="ADAL" clId="{2D240D19-45E2-4320-A1B7-FEF1D055401D}" dt="2026-08-05T09:02:47.192" v="578" actId="26606"/>
           <ac:spMkLst>
             <pc:docMk/>
             <pc:sldMk cId="3760044697" sldId="257"/>
             <ac:spMk id="77" creationId="{00000000-0000-0000-0000-000000000000}"/>
-          </ac:spMkLst>
-        </pc:spChg>
-        <pc:spChg chg="del mod">
-          <ac:chgData name="Nuber, Nathalie" userId="64826a5e-75fc-44e6-a073-417b106d7220" providerId="ADAL" clId="{2D240D19-45E2-4320-A1B7-FEF1D055401D}" dt="2026-07-08T06:12:25.466" v="246" actId="478"/>
-          <ac:spMkLst>
-            <pc:docMk/>
-            <pc:sldMk cId="3760044697" sldId="257"/>
-            <ac:spMk id="78" creationId="{00000000-0000-0000-0000-000000000000}"/>
-          </ac:spMkLst>
-        </pc:spChg>
-        <pc:spChg chg="del">
-          <ac:chgData name="Nuber, Nathalie" userId="64826a5e-75fc-44e6-a073-417b106d7220" providerId="ADAL" clId="{2D240D19-45E2-4320-A1B7-FEF1D055401D}" dt="2026-07-08T06:12:29.292" v="247" actId="478"/>
-          <ac:spMkLst>
-            <pc:docMk/>
-            <pc:sldMk cId="3760044697" sldId="257"/>
-            <ac:spMk id="79" creationId="{00000000-0000-0000-0000-000000000000}"/>
-          </ac:spMkLst>
-        </pc:spChg>
-        <pc:spChg chg="del">
-          <ac:chgData name="Nuber, Nathalie" userId="64826a5e-75fc-44e6-a073-417b106d7220" providerId="ADAL" clId="{2D240D19-45E2-4320-A1B7-FEF1D055401D}" dt="2026-07-08T06:15:32.350" v="287" actId="478"/>
-          <ac:spMkLst>
-            <pc:docMk/>
-            <pc:sldMk cId="3760044697" sldId="257"/>
-            <ac:spMk id="80" creationId="{00000000-0000-0000-0000-000000000000}"/>
-          </ac:spMkLst>
-        </pc:spChg>
-        <pc:spChg chg="mod replId">
-          <ac:chgData name="Nuber, Nathalie" userId="64826a5e-75fc-44e6-a073-417b106d7220" providerId="ADAL" clId="{2D240D19-45E2-4320-A1B7-FEF1D055401D}" dt="2026-07-08T05:38:11.343" v="238" actId="26606"/>
-          <ac:spMkLst>
-            <pc:docMk/>
-            <pc:sldMk cId="3760044697" sldId="257"/>
-            <ac:spMk id="84" creationId="{51110BC9-741F-0D84-14B2-5D81FA26ACC2}"/>
-          </ac:spMkLst>
-        </pc:spChg>
-        <pc:spChg chg="mod replId">
-          <ac:chgData name="Nuber, Nathalie" userId="64826a5e-75fc-44e6-a073-417b106d7220" providerId="ADAL" clId="{2D240D19-45E2-4320-A1B7-FEF1D055401D}" dt="2026-07-08T05:49:21.021" v="242" actId="26606"/>
-          <ac:spMkLst>
-            <pc:docMk/>
-            <pc:sldMk cId="3760044697" sldId="257"/>
-            <ac:spMk id="85" creationId="{00000000-0000-0000-0000-000000000000}"/>
-          </ac:spMkLst>
-        </pc:spChg>
-        <pc:spChg chg="mod replId">
-          <ac:chgData name="Nuber, Nathalie" userId="64826a5e-75fc-44e6-a073-417b106d7220" providerId="ADAL" clId="{2D240D19-45E2-4320-A1B7-FEF1D055401D}" dt="2026-07-08T05:38:11.343" v="238" actId="26606"/>
-          <ac:spMkLst>
-            <pc:docMk/>
-            <pc:sldMk cId="3760044697" sldId="257"/>
-            <ac:spMk id="86" creationId="{22BBC842-3076-0B9B-43D0-EFC12CDF7711}"/>
-          </ac:spMkLst>
-        </pc:spChg>
-        <pc:spChg chg="add mod replId">
-          <ac:chgData name="Nuber, Nathalie" userId="64826a5e-75fc-44e6-a073-417b106d7220" providerId="ADAL" clId="{2D240D19-45E2-4320-A1B7-FEF1D055401D}" dt="2026-07-08T05:38:11.343" v="238" actId="26606"/>
-          <ac:spMkLst>
-            <pc:docMk/>
-            <pc:sldMk cId="3760044697" sldId="257"/>
-            <ac:spMk id="87" creationId="{33CB7D9D-DB9E-9BC9-3603-DB7E4BD34EF4}"/>
-          </ac:spMkLst>
-        </pc:spChg>
-        <pc:spChg chg="add mod replId">
-          <ac:chgData name="Nuber, Nathalie" userId="64826a5e-75fc-44e6-a073-417b106d7220" providerId="ADAL" clId="{2D240D19-45E2-4320-A1B7-FEF1D055401D}" dt="2026-07-08T05:38:11.343" v="238" actId="26606"/>
-          <ac:spMkLst>
-            <pc:docMk/>
-            <pc:sldMk cId="3760044697" sldId="257"/>
-            <ac:spMk id="88" creationId="{1F6BECBE-242C-8083-7188-FE7067BA514A}"/>
           </ac:spMkLst>
         </pc:spChg>
         <pc:spChg chg="add mod">
@@ -528,85 +400,45 @@
           </ac:spMkLst>
         </pc:spChg>
         <pc:spChg chg="add mod">
-          <ac:chgData name="Nuber, Nathalie" userId="64826a5e-75fc-44e6-a073-417b106d7220" providerId="ADAL" clId="{2D240D19-45E2-4320-A1B7-FEF1D055401D}" dt="2026-07-08T06:27:30.983" v="577" actId="1076"/>
+          <ac:chgData name="Nuber, Nathalie" userId="64826a5e-75fc-44e6-a073-417b106d7220" providerId="ADAL" clId="{2D240D19-45E2-4320-A1B7-FEF1D055401D}" dt="2026-08-05T09:02:47.192" v="578" actId="26606"/>
           <ac:spMkLst>
             <pc:docMk/>
             <pc:sldMk cId="3760044697" sldId="257"/>
             <ac:spMk id="90" creationId="{FFC95610-7C4E-102F-8F90-38AFA832D3B2}"/>
           </ac:spMkLst>
         </pc:spChg>
-        <pc:graphicFrameChg chg="mod replId modGraphic">
-          <ac:chgData name="Nuber, Nathalie" userId="64826a5e-75fc-44e6-a073-417b106d7220" providerId="ADAL" clId="{2D240D19-45E2-4320-A1B7-FEF1D055401D}" dt="2026-07-08T05:38:11.343" v="238" actId="26606"/>
+        <pc:spChg chg="add mod">
+          <ac:chgData name="Nuber, Nathalie" userId="64826a5e-75fc-44e6-a073-417b106d7220" providerId="ADAL" clId="{2D240D19-45E2-4320-A1B7-FEF1D055401D}" dt="2026-08-05T09:12:35.201" v="710" actId="20577"/>
+          <ac:spMkLst>
+            <pc:docMk/>
+            <pc:sldMk cId="3760044697" sldId="257"/>
+            <ac:spMk id="101" creationId="{00000000-0000-0000-0000-000000000000}"/>
+          </ac:spMkLst>
+        </pc:spChg>
+        <pc:spChg chg="add mod">
+          <ac:chgData name="Nuber, Nathalie" userId="64826a5e-75fc-44e6-a073-417b106d7220" providerId="ADAL" clId="{2D240D19-45E2-4320-A1B7-FEF1D055401D}" dt="2026-08-05T09:18:07.912" v="767" actId="20577"/>
+          <ac:spMkLst>
+            <pc:docMk/>
+            <pc:sldMk cId="3760044697" sldId="257"/>
+            <ac:spMk id="102" creationId="{00000000-0000-0000-0000-000000000000}"/>
+          </ac:spMkLst>
+        </pc:spChg>
+        <pc:spChg chg="add mod">
+          <ac:chgData name="Nuber, Nathalie" userId="64826a5e-75fc-44e6-a073-417b106d7220" providerId="ADAL" clId="{2D240D19-45E2-4320-A1B7-FEF1D055401D}" dt="2026-08-05T09:14:41.927" v="766" actId="20577"/>
+          <ac:spMkLst>
+            <pc:docMk/>
+            <pc:sldMk cId="3760044697" sldId="257"/>
+            <ac:spMk id="103" creationId="{00000000-0000-0000-0000-000000000000}"/>
+          </ac:spMkLst>
+        </pc:spChg>
+        <pc:graphicFrameChg chg="add mod">
+          <ac:chgData name="Nuber, Nathalie" userId="64826a5e-75fc-44e6-a073-417b106d7220" providerId="ADAL" clId="{2D240D19-45E2-4320-A1B7-FEF1D055401D}" dt="2026-08-05T09:06:14.384" v="586"/>
           <ac:graphicFrameMkLst>
             <pc:docMk/>
             <pc:sldMk cId="3760044697" sldId="257"/>
-            <ac:graphicFrameMk id="85" creationId="{5D6FCA79-BD3D-8EF5-61CC-EB4FDF9E9A6D}"/>
+            <ac:graphicFrameMk id="2" creationId="{DBDE3220-1469-CEBE-040A-D465C51AF986}"/>
           </ac:graphicFrameMkLst>
         </pc:graphicFrameChg>
-        <pc:cxnChg chg="del">
-          <ac:chgData name="Nuber, Nathalie" userId="64826a5e-75fc-44e6-a073-417b106d7220" providerId="ADAL" clId="{2D240D19-45E2-4320-A1B7-FEF1D055401D}" dt="2026-07-08T06:21:03.661" v="420" actId="478"/>
-          <ac:cxnSpMkLst>
-            <pc:docMk/>
-            <pc:sldMk cId="3760044697" sldId="257"/>
-            <ac:cxnSpMk id="2" creationId="{00000000-0000-0000-0000-000000000000}"/>
-          </ac:cxnSpMkLst>
-        </pc:cxnChg>
-        <pc:cxnChg chg="del">
-          <ac:chgData name="Nuber, Nathalie" userId="64826a5e-75fc-44e6-a073-417b106d7220" providerId="ADAL" clId="{2D240D19-45E2-4320-A1B7-FEF1D055401D}" dt="2026-07-08T06:21:04.492" v="421" actId="478"/>
-          <ac:cxnSpMkLst>
-            <pc:docMk/>
-            <pc:sldMk cId="3760044697" sldId="257"/>
-            <ac:cxnSpMk id="3" creationId="{00000000-0000-0000-0000-000000000000}"/>
-          </ac:cxnSpMkLst>
-        </pc:cxnChg>
-        <pc:cxnChg chg="del">
-          <ac:chgData name="Nuber, Nathalie" userId="64826a5e-75fc-44e6-a073-417b106d7220" providerId="ADAL" clId="{2D240D19-45E2-4320-A1B7-FEF1D055401D}" dt="2026-07-08T06:21:12.813" v="428" actId="478"/>
-          <ac:cxnSpMkLst>
-            <pc:docMk/>
-            <pc:sldMk cId="3760044697" sldId="257"/>
-            <ac:cxnSpMk id="4" creationId="{00000000-0000-0000-0000-000000000000}"/>
-          </ac:cxnSpMkLst>
-        </pc:cxnChg>
-        <pc:cxnChg chg="del mod">
-          <ac:chgData name="Nuber, Nathalie" userId="64826a5e-75fc-44e6-a073-417b106d7220" providerId="ADAL" clId="{2D240D19-45E2-4320-A1B7-FEF1D055401D}" dt="2026-07-08T06:21:11.980" v="427" actId="478"/>
-          <ac:cxnSpMkLst>
-            <pc:docMk/>
-            <pc:sldMk cId="3760044697" sldId="257"/>
-            <ac:cxnSpMk id="5" creationId="{00000000-0000-0000-0000-000000000000}"/>
-          </ac:cxnSpMkLst>
-        </pc:cxnChg>
-        <pc:cxnChg chg="del">
-          <ac:chgData name="Nuber, Nathalie" userId="64826a5e-75fc-44e6-a073-417b106d7220" providerId="ADAL" clId="{2D240D19-45E2-4320-A1B7-FEF1D055401D}" dt="2026-07-08T06:21:26.699" v="432" actId="478"/>
-          <ac:cxnSpMkLst>
-            <pc:docMk/>
-            <pc:sldMk cId="3760044697" sldId="257"/>
-            <ac:cxnSpMk id="6" creationId="{00000000-0000-0000-0000-000000000000}"/>
-          </ac:cxnSpMkLst>
-        </pc:cxnChg>
-        <pc:cxnChg chg="del">
-          <ac:chgData name="Nuber, Nathalie" userId="64826a5e-75fc-44e6-a073-417b106d7220" providerId="ADAL" clId="{2D240D19-45E2-4320-A1B7-FEF1D055401D}" dt="2026-07-08T06:21:29.356" v="434" actId="478"/>
-          <ac:cxnSpMkLst>
-            <pc:docMk/>
-            <pc:sldMk cId="3760044697" sldId="257"/>
-            <ac:cxnSpMk id="7" creationId="{00000000-0000-0000-0000-000000000000}"/>
-          </ac:cxnSpMkLst>
-        </pc:cxnChg>
-        <pc:cxnChg chg="add del mod">
-          <ac:chgData name="Nuber, Nathalie" userId="64826a5e-75fc-44e6-a073-417b106d7220" providerId="ADAL" clId="{2D240D19-45E2-4320-A1B7-FEF1D055401D}" dt="2026-07-07T14:09:39.164" v="4" actId="478"/>
-          <ac:cxnSpMkLst>
-            <pc:docMk/>
-            <pc:sldMk cId="3760044697" sldId="257"/>
-            <ac:cxnSpMk id="7" creationId="{12483101-45BE-E284-1EF1-5ECB5C05B2A2}"/>
-          </ac:cxnSpMkLst>
-        </pc:cxnChg>
-        <pc:cxnChg chg="add del">
-          <ac:chgData name="Nuber, Nathalie" userId="64826a5e-75fc-44e6-a073-417b106d7220" providerId="ADAL" clId="{2D240D19-45E2-4320-A1B7-FEF1D055401D}" dt="2026-07-07T14:10:18.282" v="6" actId="478"/>
-          <ac:cxnSpMkLst>
-            <pc:docMk/>
-            <pc:sldMk cId="3760044697" sldId="257"/>
-            <ac:cxnSpMk id="9" creationId="{D800F590-308B-E3F9-CB42-2D796A0EE111}"/>
-          </ac:cxnSpMkLst>
-        </pc:cxnChg>
         <pc:cxnChg chg="mod">
           <ac:chgData name="Nuber, Nathalie" userId="64826a5e-75fc-44e6-a073-417b106d7220" providerId="ADAL" clId="{2D240D19-45E2-4320-A1B7-FEF1D055401D}" dt="2026-07-08T06:22:23.028" v="487" actId="1036"/>
           <ac:cxnSpMkLst>
@@ -655,69 +487,6 @@
             <ac:cxnSpMk id="29" creationId="{00000000-0000-0000-0000-000000000000}"/>
           </ac:cxnSpMkLst>
         </pc:cxnChg>
-        <pc:cxnChg chg="del">
-          <ac:chgData name="Nuber, Nathalie" userId="64826a5e-75fc-44e6-a073-417b106d7220" providerId="ADAL" clId="{2D240D19-45E2-4320-A1B7-FEF1D055401D}" dt="2026-07-08T06:19:11.341" v="401" actId="478"/>
-          <ac:cxnSpMkLst>
-            <pc:docMk/>
-            <pc:sldMk cId="3760044697" sldId="257"/>
-            <ac:cxnSpMk id="65" creationId="{00000000-0000-0000-0000-000000000000}"/>
-          </ac:cxnSpMkLst>
-        </pc:cxnChg>
-        <pc:cxnChg chg="mod replId">
-          <ac:chgData name="Nuber, Nathalie" userId="64826a5e-75fc-44e6-a073-417b106d7220" providerId="ADAL" clId="{2D240D19-45E2-4320-A1B7-FEF1D055401D}" dt="2026-07-08T05:49:21.021" v="242" actId="26606"/>
-          <ac:cxnSpMkLst>
-            <pc:docMk/>
-            <pc:sldMk cId="3760044697" sldId="257"/>
-            <ac:cxnSpMk id="84" creationId="{00000000-0000-0000-0000-000000000000}"/>
-          </ac:cxnSpMkLst>
-        </pc:cxnChg>
-        <pc:cxnChg chg="mod replId">
-          <ac:chgData name="Nuber, Nathalie" userId="64826a5e-75fc-44e6-a073-417b106d7220" providerId="ADAL" clId="{2D240D19-45E2-4320-A1B7-FEF1D055401D}" dt="2026-07-08T05:49:21.021" v="242" actId="26606"/>
-          <ac:cxnSpMkLst>
-            <pc:docMk/>
-            <pc:sldMk cId="3760044697" sldId="257"/>
-            <ac:cxnSpMk id="86" creationId="{00000000-0000-0000-0000-000000000000}"/>
-          </ac:cxnSpMkLst>
-        </pc:cxnChg>
-      </pc:sldChg>
-      <pc:sldChg chg="addSp delSp modSp new del mod setBg">
-        <pc:chgData name="Nuber, Nathalie" userId="64826a5e-75fc-44e6-a073-417b106d7220" providerId="ADAL" clId="{2D240D19-45E2-4320-A1B7-FEF1D055401D}" dt="2026-07-08T06:15:44.294" v="288" actId="2696"/>
-        <pc:sldMkLst>
-          <pc:docMk/>
-          <pc:sldMk cId="4152137120" sldId="258"/>
-        </pc:sldMkLst>
-        <pc:spChg chg="del">
-          <ac:chgData name="Nuber, Nathalie" userId="64826a5e-75fc-44e6-a073-417b106d7220" providerId="ADAL" clId="{2D240D19-45E2-4320-A1B7-FEF1D055401D}" dt="2026-07-08T05:45:22.627" v="241" actId="26606"/>
-          <ac:spMkLst>
-            <pc:docMk/>
-            <pc:sldMk cId="4152137120" sldId="258"/>
-            <ac:spMk id="2" creationId="{DE4FC323-0E8A-BF15-6DDF-2A60CE784997}"/>
-          </ac:spMkLst>
-        </pc:spChg>
-        <pc:spChg chg="del">
-          <ac:chgData name="Nuber, Nathalie" userId="64826a5e-75fc-44e6-a073-417b106d7220" providerId="ADAL" clId="{2D240D19-45E2-4320-A1B7-FEF1D055401D}" dt="2026-07-08T05:45:18.455" v="240" actId="931"/>
-          <ac:spMkLst>
-            <pc:docMk/>
-            <pc:sldMk cId="4152137120" sldId="258"/>
-            <ac:spMk id="3" creationId="{5D046FEB-8E90-A5EB-8C91-309F11950506}"/>
-          </ac:spMkLst>
-        </pc:spChg>
-        <pc:spChg chg="add">
-          <ac:chgData name="Nuber, Nathalie" userId="64826a5e-75fc-44e6-a073-417b106d7220" providerId="ADAL" clId="{2D240D19-45E2-4320-A1B7-FEF1D055401D}" dt="2026-07-08T05:45:22.627" v="241" actId="26606"/>
-          <ac:spMkLst>
-            <pc:docMk/>
-            <pc:sldMk cId="4152137120" sldId="258"/>
-            <ac:spMk id="10" creationId="{42A4FC2C-047E-45A5-965D-8E1E3BF09BC6}"/>
-          </ac:spMkLst>
-        </pc:spChg>
-        <pc:picChg chg="add mod ord">
-          <ac:chgData name="Nuber, Nathalie" userId="64826a5e-75fc-44e6-a073-417b106d7220" providerId="ADAL" clId="{2D240D19-45E2-4320-A1B7-FEF1D055401D}" dt="2026-07-08T05:52:13.298" v="244" actId="14100"/>
-          <ac:picMkLst>
-            <pc:docMk/>
-            <pc:sldMk cId="4152137120" sldId="258"/>
-            <ac:picMk id="5" creationId="{6A79B49B-2661-F35B-BE49-761048035A49}"/>
-          </ac:picMkLst>
-        </pc:picChg>
       </pc:sldChg>
       <pc:sldMasterChg chg="delSp mod">
         <pc:chgData name="Nuber, Nathalie" userId="64826a5e-75fc-44e6-a073-417b106d7220" providerId="ADAL" clId="{2D240D19-45E2-4320-A1B7-FEF1D055401D}" dt="2026-07-07T13:55:57.137" v="0" actId="33475"/>
@@ -725,14 +494,6 @@
           <pc:docMk/>
           <pc:sldMasterMk cId="3088136424" sldId="2147483648"/>
         </pc:sldMasterMkLst>
-        <pc:spChg chg="del">
-          <ac:chgData name="Nuber, Nathalie" userId="64826a5e-75fc-44e6-a073-417b106d7220" providerId="ADAL" clId="{2D240D19-45E2-4320-A1B7-FEF1D055401D}" dt="2026-07-07T13:55:57.137" v="0" actId="33475"/>
-          <ac:spMkLst>
-            <pc:docMk/>
-            <pc:sldMasterMk cId="3088136424" sldId="2147483648"/>
-            <ac:spMk id="8" creationId="{5BCFCFC9-D431-F538-FAC8-666136B21F42}"/>
-          </ac:spMkLst>
-        </pc:spChg>
       </pc:sldMasterChg>
     </pc:docChg>
   </pc:docChgLst>
@@ -886,7 +647,7 @@
           <a:p>
             <a:fld id="{4FBACE8C-E1EE-45FA-8CBB-91F934F074DA}" type="datetimeFigureOut">
               <a:rPr lang="de-DE" smtClean="0"/>
-              <a:t>08.07.2026</a:t>
+              <a:t>05.08.2026</a:t>
             </a:fld>
             <a:endParaRPr lang="de-DE"/>
           </a:p>
@@ -1084,7 +845,7 @@
           <a:p>
             <a:fld id="{4FBACE8C-E1EE-45FA-8CBB-91F934F074DA}" type="datetimeFigureOut">
               <a:rPr lang="de-DE" smtClean="0"/>
-              <a:t>08.07.2026</a:t>
+              <a:t>05.08.2026</a:t>
             </a:fld>
             <a:endParaRPr lang="de-DE"/>
           </a:p>
@@ -1292,7 +1053,7 @@
           <a:p>
             <a:fld id="{4FBACE8C-E1EE-45FA-8CBB-91F934F074DA}" type="datetimeFigureOut">
               <a:rPr lang="de-DE" smtClean="0"/>
-              <a:t>08.07.2026</a:t>
+              <a:t>05.08.2026</a:t>
             </a:fld>
             <a:endParaRPr lang="de-DE"/>
           </a:p>
@@ -1490,7 +1251,7 @@
           <a:p>
             <a:fld id="{4FBACE8C-E1EE-45FA-8CBB-91F934F074DA}" type="datetimeFigureOut">
               <a:rPr lang="de-DE" smtClean="0"/>
-              <a:t>08.07.2026</a:t>
+              <a:t>05.08.2026</a:t>
             </a:fld>
             <a:endParaRPr lang="de-DE"/>
           </a:p>
@@ -1765,7 +1526,7 @@
           <a:p>
             <a:fld id="{4FBACE8C-E1EE-45FA-8CBB-91F934F074DA}" type="datetimeFigureOut">
               <a:rPr lang="de-DE" smtClean="0"/>
-              <a:t>08.07.2026</a:t>
+              <a:t>05.08.2026</a:t>
             </a:fld>
             <a:endParaRPr lang="de-DE"/>
           </a:p>
@@ -2030,7 +1791,7 @@
           <a:p>
             <a:fld id="{4FBACE8C-E1EE-45FA-8CBB-91F934F074DA}" type="datetimeFigureOut">
               <a:rPr lang="de-DE" smtClean="0"/>
-              <a:t>08.07.2026</a:t>
+              <a:t>05.08.2026</a:t>
             </a:fld>
             <a:endParaRPr lang="de-DE"/>
           </a:p>
@@ -2442,7 +2203,7 @@
           <a:p>
             <a:fld id="{4FBACE8C-E1EE-45FA-8CBB-91F934F074DA}" type="datetimeFigureOut">
               <a:rPr lang="de-DE" smtClean="0"/>
-              <a:t>08.07.2026</a:t>
+              <a:t>05.08.2026</a:t>
             </a:fld>
             <a:endParaRPr lang="de-DE"/>
           </a:p>
@@ -2583,7 +2344,7 @@
           <a:p>
             <a:fld id="{4FBACE8C-E1EE-45FA-8CBB-91F934F074DA}" type="datetimeFigureOut">
               <a:rPr lang="de-DE" smtClean="0"/>
-              <a:t>08.07.2026</a:t>
+              <a:t>05.08.2026</a:t>
             </a:fld>
             <a:endParaRPr lang="de-DE"/>
           </a:p>
@@ -2696,7 +2457,7 @@
           <a:p>
             <a:fld id="{4FBACE8C-E1EE-45FA-8CBB-91F934F074DA}" type="datetimeFigureOut">
               <a:rPr lang="de-DE" smtClean="0"/>
-              <a:t>08.07.2026</a:t>
+              <a:t>05.08.2026</a:t>
             </a:fld>
             <a:endParaRPr lang="de-DE"/>
           </a:p>
@@ -3007,7 +2768,7 @@
           <a:p>
             <a:fld id="{4FBACE8C-E1EE-45FA-8CBB-91F934F074DA}" type="datetimeFigureOut">
               <a:rPr lang="de-DE" smtClean="0"/>
-              <a:t>08.07.2026</a:t>
+              <a:t>05.08.2026</a:t>
             </a:fld>
             <a:endParaRPr lang="de-DE"/>
           </a:p>
@@ -3295,7 +3056,7 @@
           <a:p>
             <a:fld id="{4FBACE8C-E1EE-45FA-8CBB-91F934F074DA}" type="datetimeFigureOut">
               <a:rPr lang="de-DE" smtClean="0"/>
-              <a:t>08.07.2026</a:t>
+              <a:t>05.08.2026</a:t>
             </a:fld>
             <a:endParaRPr lang="de-DE"/>
           </a:p>
@@ -3536,7 +3297,7 @@
           <a:p>
             <a:fld id="{4FBACE8C-E1EE-45FA-8CBB-91F934F074DA}" type="datetimeFigureOut">
               <a:rPr lang="de-DE" smtClean="0"/>
-              <a:t>08.07.2026</a:t>
+              <a:t>05.08.2026</a:t>
             </a:fld>
             <a:endParaRPr lang="de-DE"/>
           </a:p>
@@ -3969,7 +3730,7 @@
         </p:nvSpPr>
         <p:spPr>
           <a:xfrm>
-            <a:off x="768096" y="376138"/>
+            <a:off x="781811" y="367028"/>
             <a:ext cx="10671048" cy="418576"/>
           </a:xfrm>
           <a:prstGeom prst="rect">
@@ -5974,14 +5735,14 @@
         </p:nvSpPr>
         <p:spPr>
           <a:xfrm>
-            <a:off x="758952" y="3164732"/>
-            <a:ext cx="246888" cy="246888"/>
+            <a:off x="763536" y="3169304"/>
+            <a:ext cx="219456" cy="219456"/>
           </a:xfrm>
           <a:prstGeom prst="ellipse">
             <a:avLst/>
           </a:prstGeom>
           <a:solidFill>
-            <a:srgbClr val="EA752C"/>
+            <a:srgbClr val="085D7E"/>
           </a:solidFill>
           <a:ln w="17780">
             <a:solidFill>
@@ -6020,7 +5781,53 @@
         </p:nvSpPr>
         <p:spPr>
           <a:xfrm>
-            <a:off x="4814316" y="3164732"/>
+            <a:off x="4791456" y="3141872"/>
+            <a:ext cx="274320" cy="274320"/>
+          </a:xfrm>
+          <a:prstGeom prst="diamond">
+            <a:avLst/>
+          </a:prstGeom>
+          <a:solidFill>
+            <a:srgbClr val="EA752C"/>
+          </a:solidFill>
+          <a:ln w="15240">
+            <a:solidFill>
+              <a:srgbClr val="FFFFFF"/>
+            </a:solidFill>
+          </a:ln>
+        </p:spPr>
+        <p:style>
+          <a:lnRef idx="1">
+            <a:schemeClr val="accent1"/>
+          </a:lnRef>
+          <a:fillRef idx="3">
+            <a:schemeClr val="accent1"/>
+          </a:fillRef>
+          <a:effectRef idx="2">
+            <a:schemeClr val="accent1"/>
+          </a:effectRef>
+          <a:fontRef idx="minor">
+            <a:schemeClr val="lt1"/>
+          </a:fontRef>
+        </p:style>
+        <p:txBody>
+          <a:bodyPr wrap="square" rtlCol="0" anchor="ctr"/>
+          <a:lstStyle/>
+          <a:p>
+            <a:pPr algn="ctr"/>
+            <a:endParaRPr/>
+          </a:p>
+        </p:txBody>
+      </p:sp>
+      <p:sp>
+        <p:nvSpPr>
+          <p:cNvPr id="64" name="Diamond 63"/>
+          <p:cNvSpPr/>
+          <p:nvPr/>
+        </p:nvSpPr>
+        <p:spPr>
+          <a:xfrm>
+            <a:off x="10904220" y="3164732"/>
             <a:ext cx="228600" cy="228600"/>
           </a:xfrm>
           <a:prstGeom prst="diamond">
@@ -6060,52 +5867,6 @@
       </p:sp>
       <p:sp>
         <p:nvSpPr>
-          <p:cNvPr id="64" name="Diamond 63"/>
-          <p:cNvSpPr/>
-          <p:nvPr/>
-        </p:nvSpPr>
-        <p:spPr>
-          <a:xfrm>
-            <a:off x="10904220" y="3164732"/>
-            <a:ext cx="228600" cy="228600"/>
-          </a:xfrm>
-          <a:prstGeom prst="diamond">
-            <a:avLst/>
-          </a:prstGeom>
-          <a:solidFill>
-            <a:srgbClr val="024767"/>
-          </a:solidFill>
-          <a:ln w="15240">
-            <a:solidFill>
-              <a:srgbClr val="FFFFFF"/>
-            </a:solidFill>
-          </a:ln>
-        </p:spPr>
-        <p:style>
-          <a:lnRef idx="1">
-            <a:schemeClr val="accent1"/>
-          </a:lnRef>
-          <a:fillRef idx="3">
-            <a:schemeClr val="accent1"/>
-          </a:fillRef>
-          <a:effectRef idx="2">
-            <a:schemeClr val="accent1"/>
-          </a:effectRef>
-          <a:fontRef idx="minor">
-            <a:schemeClr val="lt1"/>
-          </a:fontRef>
-        </p:style>
-        <p:txBody>
-          <a:bodyPr wrap="square" rtlCol="0" anchor="ctr"/>
-          <a:lstStyle/>
-          <a:p>
-            <a:pPr algn="ctr"/>
-            <a:endParaRPr/>
-          </a:p>
-        </p:txBody>
-      </p:sp>
-      <p:sp>
-        <p:nvSpPr>
           <p:cNvPr id="67" name="TextBox 66"/>
           <p:cNvSpPr txBox="1">
             <a:spLocks/>
@@ -6582,8 +6343,8 @@
         </p:nvSpPr>
         <p:spPr>
           <a:xfrm>
-            <a:off x="3922776" y="4843924"/>
-            <a:ext cx="2103120" cy="216919"/>
+            <a:off x="3624336" y="4400000"/>
+            <a:ext cx="2700000" cy="216919"/>
           </a:xfrm>
           <a:prstGeom prst="rect">
             <a:avLst/>
@@ -6602,13 +6363,13 @@
               </a:lnSpc>
             </a:pPr>
             <a:r>
-              <a:rPr lang="de-DE" sz="1400" b="1" dirty="0">
-                <a:solidFill>
-                  <a:srgbClr val="024767"/>
-                </a:solidFill>
-                <a:latin typeface="Aptos"/>
-              </a:rPr>
-              <a:t>ZWISCHENTERMIN</a:t>
+              <a:rPr lang="de-DE" sz="1400" b="1">
+                <a:solidFill>
+                  <a:srgbClr val="EA752C"/>
+                </a:solidFill>
+                <a:latin typeface="Aptos"/>
+              </a:rPr>
+              <a:t>ZWISCHENTERMIN – HEUTE</a:t>
             </a:r>
           </a:p>
         </p:txBody>
@@ -6621,8 +6382,8 @@
         </p:nvSpPr>
         <p:spPr>
           <a:xfrm>
-            <a:off x="4443984" y="5057539"/>
-            <a:ext cx="1060704" cy="233910"/>
+            <a:off x="3624336" y="4660000"/>
+            <a:ext cx="2700000" cy="233910"/>
           </a:xfrm>
           <a:prstGeom prst="rect">
             <a:avLst/>
@@ -6636,6 +6397,15 @@
           <a:lstStyle/>
           <a:p>
             <a:pPr algn="ctr"/>
+            <a:r>
+              <a:rPr lang="de-DE" sz="1400" b="0">
+                <a:solidFill>
+                  <a:srgbClr val="0E2B44"/>
+                </a:solidFill>
+                <a:latin typeface="Aptos"/>
+              </a:rPr>
+              <a:t>Stand KW 32 – </a:t>
+            </a:r>
             <a:r>
               <a:rPr lang="de-DE" sz="1400" b="0" dirty="0">
                 <a:solidFill>
@@ -6723,8 +6493,8 @@
         </p:nvSpPr>
         <p:spPr>
           <a:xfrm>
-            <a:off x="169164" y="4756816"/>
-            <a:ext cx="1426464" cy="601447"/>
+            <a:off x="169164" y="4410131"/>
+            <a:ext cx="1426464" cy="213648"/>
           </a:xfrm>
           <a:prstGeom prst="rect">
             <a:avLst/>
@@ -6743,51 +6513,14 @@
               </a:lnSpc>
             </a:pPr>
             <a:r>
-              <a:rPr lang="de-DE" sz="1400" b="1" dirty="0">
-                <a:solidFill>
-                  <a:srgbClr val="EA752C"/>
-                </a:solidFill>
-                <a:latin typeface="Aptos"/>
-              </a:rPr>
-              <a:t>AKTUELLER</a:t>
-            </a:r>
-          </a:p>
-          <a:p>
-            <a:pPr algn="ctr">
-              <a:lnSpc>
-                <a:spcPct val="90000"/>
-              </a:lnSpc>
-            </a:pPr>
-            <a:r>
-              <a:rPr lang="de-DE" sz="1400" b="1" dirty="0">
-                <a:solidFill>
-                  <a:srgbClr val="EA752C"/>
-                </a:solidFill>
-                <a:latin typeface="Aptos"/>
-              </a:rPr>
-              <a:t>ZEITPUNKT</a:t>
-            </a:r>
-          </a:p>
-          <a:p>
-            <a:pPr algn="ctr">
-              <a:lnSpc>
-                <a:spcPct val="90000"/>
-              </a:lnSpc>
-            </a:pPr>
-            <a:r>
-              <a:rPr lang="de-DE" sz="1400" dirty="0">
-                <a:solidFill>
-                  <a:srgbClr val="0E2B44"/>
-                </a:solidFill>
-              </a:rPr>
-              <a:t>Kick-off</a:t>
-            </a:r>
-            <a:endParaRPr lang="de-DE" sz="1400" b="1" dirty="0">
-              <a:solidFill>
-                <a:srgbClr val="EA752C"/>
-              </a:solidFill>
-              <a:latin typeface="Aptos"/>
-            </a:endParaRPr>
+              <a:rPr lang="de-DE" sz="1400" b="1">
+                <a:solidFill>
+                  <a:srgbClr val="024767"/>
+                </a:solidFill>
+                <a:latin typeface="Aptos"/>
+              </a:rPr>
+              <a:t>KICK-OFF</a:t>
+            </a:r>
           </a:p>
         </p:txBody>
       </p:sp>
@@ -6857,7 +6590,7 @@
         </p:nvSpPr>
         <p:spPr>
           <a:xfrm>
-            <a:off x="9952101" y="4843924"/>
+            <a:off x="9952101" y="4400000"/>
             <a:ext cx="2103120" cy="216919"/>
           </a:xfrm>
           <a:prstGeom prst="rect">
@@ -6884,6 +6617,389 @@
                 <a:latin typeface="Aptos"/>
               </a:rPr>
               <a:t>PRÄSENTATIONSTERMIN</a:t>
+            </a:r>
+          </a:p>
+        </p:txBody>
+      </p:sp>
+      <p:sp>
+        <p:nvSpPr>
+          <p:cNvPr id="101" name="Card 1"/>
+          <p:cNvSpPr/>
+          <p:nvPr/>
+        </p:nvSpPr>
+        <p:spPr>
+          <a:xfrm>
+            <a:off x="685800" y="5100000"/>
+            <a:ext cx="3480000" cy="1400000"/>
+          </a:xfrm>
+          <a:prstGeom prst="roundRect">
+            <a:avLst>
+              <a:gd name="adj" fmla="val 6000"/>
+            </a:avLst>
+          </a:prstGeom>
+          <a:ln/>
+        </p:spPr>
+        <p:style>
+          <a:lnRef idx="2">
+            <a:schemeClr val="accent6"/>
+          </a:lnRef>
+          <a:fillRef idx="1">
+            <a:schemeClr val="lt1"/>
+          </a:fillRef>
+          <a:effectRef idx="0">
+            <a:schemeClr val="accent6"/>
+          </a:effectRef>
+          <a:fontRef idx="minor">
+            <a:schemeClr val="dk1"/>
+          </a:fontRef>
+        </p:style>
+        <p:txBody>
+          <a:bodyPr wrap="square" lIns="137160" tIns="91440" rIns="137160" bIns="91440" anchor="t"/>
+          <a:lstStyle/>
+          <a:p>
+            <a:pPr algn="l"/>
+            <a:r>
+              <a:rPr lang="de-DE" sz="1100" b="1" dirty="0">
+                <a:solidFill>
+                  <a:srgbClr val="024767"/>
+                </a:solidFill>
+                <a:latin typeface="Aptos"/>
+              </a:rPr>
+              <a:t>ERLEDIGT</a:t>
+            </a:r>
+          </a:p>
+          <a:p>
+            <a:pPr marL="171450" indent="-171450" algn="l">
+              <a:spcBef>
+                <a:spcPts val="400"/>
+              </a:spcBef>
+              <a:buChar char="•"/>
+            </a:pPr>
+            <a:r>
+              <a:rPr lang="de-DE" sz="1000" dirty="0">
+                <a:solidFill>
+                  <a:srgbClr val="0E2B44"/>
+                </a:solidFill>
+                <a:latin typeface="Aptos"/>
+              </a:rPr>
+              <a:t>Gliederung</a:t>
+            </a:r>
+          </a:p>
+          <a:p>
+            <a:pPr marL="171450" indent="-171450" algn="l">
+              <a:spcBef>
+                <a:spcPts val="300"/>
+              </a:spcBef>
+              <a:buChar char="•"/>
+            </a:pPr>
+            <a:r>
+              <a:rPr lang="de-DE" sz="1000" dirty="0">
+                <a:solidFill>
+                  <a:srgbClr val="0E2B44"/>
+                </a:solidFill>
+                <a:latin typeface="Aptos"/>
+              </a:rPr>
+              <a:t>Grundlagen-Recherche</a:t>
+            </a:r>
+          </a:p>
+          <a:p>
+            <a:pPr marL="171450" indent="-171450" algn="l">
+              <a:spcBef>
+                <a:spcPts val="300"/>
+              </a:spcBef>
+              <a:buChar char="•"/>
+            </a:pPr>
+            <a:r>
+              <a:rPr lang="de-DE" sz="1000" dirty="0">
+                <a:solidFill>
+                  <a:srgbClr val="0E2B44"/>
+                </a:solidFill>
+                <a:latin typeface="Aptos"/>
+              </a:rPr>
+              <a:t>Erster Entwurf Grundlagenkapitel</a:t>
+            </a:r>
+          </a:p>
+          <a:p>
+            <a:pPr marL="171450" indent="-171450" algn="l">
+              <a:spcBef>
+                <a:spcPts val="300"/>
+              </a:spcBef>
+              <a:buChar char="•"/>
+            </a:pPr>
+            <a:r>
+              <a:rPr lang="de-DE" sz="1000" dirty="0">
+                <a:solidFill>
+                  <a:srgbClr val="0E2B44"/>
+                </a:solidFill>
+                <a:latin typeface="Aptos"/>
+              </a:rPr>
+              <a:t>Einarbeitung in bestehende Testansätze</a:t>
+            </a:r>
+          </a:p>
+          <a:p>
+            <a:pPr marL="171450" indent="-171450">
+              <a:spcBef>
+                <a:spcPts val="300"/>
+              </a:spcBef>
+              <a:buFontTx/>
+              <a:buChar char="•"/>
+            </a:pPr>
+            <a:r>
+              <a:rPr lang="de-DE" sz="1000" dirty="0" err="1">
+                <a:solidFill>
+                  <a:srgbClr val="0E2B44"/>
+                </a:solidFill>
+              </a:rPr>
+              <a:t>Requirements</a:t>
+            </a:r>
+            <a:r>
+              <a:rPr lang="de-DE" sz="1000" dirty="0">
+                <a:solidFill>
+                  <a:srgbClr val="0E2B44"/>
+                </a:solidFill>
+              </a:rPr>
+              <a:t> aus MVO </a:t>
+            </a:r>
+          </a:p>
+          <a:p>
+            <a:pPr marL="171450" indent="-171450" algn="l">
+              <a:spcBef>
+                <a:spcPts val="300"/>
+              </a:spcBef>
+              <a:buChar char="•"/>
+            </a:pPr>
+            <a:endParaRPr lang="de-DE" sz="1000" dirty="0">
+              <a:solidFill>
+                <a:srgbClr val="0E2B44"/>
+              </a:solidFill>
+              <a:latin typeface="Aptos"/>
+            </a:endParaRPr>
+          </a:p>
+        </p:txBody>
+      </p:sp>
+      <p:sp>
+        <p:nvSpPr>
+          <p:cNvPr id="102" name="Card 2"/>
+          <p:cNvSpPr/>
+          <p:nvPr/>
+        </p:nvSpPr>
+        <p:spPr>
+          <a:xfrm>
+            <a:off x="4409132" y="5081862"/>
+            <a:ext cx="3480000" cy="1400000"/>
+          </a:xfrm>
+          <a:prstGeom prst="roundRect">
+            <a:avLst>
+              <a:gd name="adj" fmla="val 6000"/>
+            </a:avLst>
+          </a:prstGeom>
+          <a:solidFill>
+            <a:srgbClr val="FDF0E4"/>
+          </a:solidFill>
+          <a:ln w="15240">
+            <a:solidFill>
+              <a:srgbClr val="EA752C"/>
+            </a:solidFill>
+          </a:ln>
+        </p:spPr>
+        <p:txBody>
+          <a:bodyPr wrap="square" lIns="137160" tIns="91440" rIns="137160" bIns="91440" anchor="t"/>
+          <a:lstStyle/>
+          <a:p>
+            <a:pPr algn="l"/>
+            <a:r>
+              <a:rPr lang="de-DE" sz="1100" b="1" dirty="0">
+                <a:solidFill>
+                  <a:srgbClr val="EA752C"/>
+                </a:solidFill>
+                <a:latin typeface="Aptos"/>
+              </a:rPr>
+              <a:t>AKTUELL </a:t>
+            </a:r>
+          </a:p>
+          <a:p>
+            <a:pPr marL="171450" indent="-171450" algn="l">
+              <a:spcBef>
+                <a:spcPts val="400"/>
+              </a:spcBef>
+              <a:buChar char="•"/>
+            </a:pPr>
+            <a:r>
+              <a:rPr lang="de-DE" sz="1000" b="1" dirty="0">
+                <a:solidFill>
+                  <a:srgbClr val="0E2B44"/>
+                </a:solidFill>
+                <a:latin typeface="Aptos"/>
+              </a:rPr>
+              <a:t>Fokus: Erstellung der TARA</a:t>
+            </a:r>
+            <a:r>
+              <a:rPr lang="de-DE" sz="1000" dirty="0">
+                <a:solidFill>
+                  <a:srgbClr val="0E2B44"/>
+                </a:solidFill>
+                <a:latin typeface="Aptos"/>
+              </a:rPr>
+              <a:t>, Bestimmung der Assets</a:t>
+            </a:r>
+          </a:p>
+          <a:p>
+            <a:pPr marL="171450" indent="-171450" algn="l">
+              <a:spcBef>
+                <a:spcPts val="300"/>
+              </a:spcBef>
+              <a:buChar char="•"/>
+            </a:pPr>
+            <a:r>
+              <a:rPr lang="de-DE" sz="1000" dirty="0">
+                <a:solidFill>
+                  <a:srgbClr val="0E2B44"/>
+                </a:solidFill>
+                <a:latin typeface="Aptos"/>
+              </a:rPr>
+              <a:t>Parallel: Mapping Anforderungen auf relevante Normen (</a:t>
+            </a:r>
+            <a:r>
+              <a:rPr lang="de-DE" sz="1000" dirty="0" err="1">
+                <a:solidFill>
+                  <a:srgbClr val="0E2B44"/>
+                </a:solidFill>
+                <a:latin typeface="Aptos"/>
+              </a:rPr>
+              <a:t>prEN</a:t>
+            </a:r>
+            <a:r>
+              <a:rPr lang="de-DE" sz="1000" dirty="0">
+                <a:solidFill>
+                  <a:srgbClr val="0E2B44"/>
+                </a:solidFill>
+                <a:latin typeface="Aptos"/>
+              </a:rPr>
+              <a:t> 50742, IEC 62443)</a:t>
+            </a:r>
+          </a:p>
+          <a:p>
+            <a:pPr marL="171450" indent="-171450" algn="l">
+              <a:spcBef>
+                <a:spcPts val="300"/>
+              </a:spcBef>
+              <a:buChar char="•"/>
+            </a:pPr>
+            <a:r>
+              <a:rPr lang="de-DE" sz="1000" dirty="0">
+                <a:solidFill>
+                  <a:srgbClr val="8A4A12"/>
+                </a:solidFill>
+                <a:latin typeface="Aptos"/>
+              </a:rPr>
+              <a:t>Entwicklung der Testmethodik verschiebt sich dadurch leicht nach hinten</a:t>
+            </a:r>
+          </a:p>
+        </p:txBody>
+      </p:sp>
+      <p:sp>
+        <p:nvSpPr>
+          <p:cNvPr id="103" name="Card 3"/>
+          <p:cNvSpPr/>
+          <p:nvPr/>
+        </p:nvSpPr>
+        <p:spPr>
+          <a:xfrm>
+            <a:off x="8026200" y="5100000"/>
+            <a:ext cx="3480000" cy="1400000"/>
+          </a:xfrm>
+          <a:prstGeom prst="roundRect">
+            <a:avLst>
+              <a:gd name="adj" fmla="val 6000"/>
+            </a:avLst>
+          </a:prstGeom>
+          <a:solidFill>
+            <a:schemeClr val="accent2">
+              <a:alpha val="50000"/>
+            </a:schemeClr>
+          </a:solidFill>
+          <a:ln>
+            <a:noFill/>
+          </a:ln>
+        </p:spPr>
+        <p:style>
+          <a:lnRef idx="0">
+            <a:scrgbClr r="0" g="0" b="0"/>
+          </a:lnRef>
+          <a:fillRef idx="0">
+            <a:scrgbClr r="0" g="0" b="0"/>
+          </a:fillRef>
+          <a:effectRef idx="0">
+            <a:scrgbClr r="0" g="0" b="0"/>
+          </a:effectRef>
+          <a:fontRef idx="minor">
+            <a:schemeClr val="lt1"/>
+          </a:fontRef>
+        </p:style>
+        <p:txBody>
+          <a:bodyPr wrap="square" lIns="137160" tIns="91440" rIns="137160" bIns="91440" anchor="t"/>
+          <a:lstStyle/>
+          <a:p>
+            <a:pPr algn="l"/>
+            <a:r>
+              <a:rPr lang="de-DE" sz="1100" b="1" dirty="0">
+                <a:solidFill>
+                  <a:srgbClr val="024767"/>
+                </a:solidFill>
+                <a:latin typeface="Aptos"/>
+              </a:rPr>
+              <a:t>NÄCHSTE SCHRITTE</a:t>
+            </a:r>
+          </a:p>
+          <a:p>
+            <a:pPr marL="171450" indent="-171450" algn="l">
+              <a:spcBef>
+                <a:spcPts val="400"/>
+              </a:spcBef>
+              <a:buChar char="•"/>
+            </a:pPr>
+            <a:r>
+              <a:rPr lang="de-DE" sz="1000" dirty="0">
+                <a:solidFill>
+                  <a:srgbClr val="0E2B44"/>
+                </a:solidFill>
+                <a:latin typeface="Aptos"/>
+              </a:rPr>
+              <a:t>Ableitung Testziele</a:t>
+            </a:r>
+          </a:p>
+          <a:p>
+            <a:pPr marL="171450" indent="-171450" algn="l">
+              <a:spcBef>
+                <a:spcPts val="400"/>
+              </a:spcBef>
+              <a:buChar char="•"/>
+            </a:pPr>
+            <a:r>
+              <a:rPr lang="de-DE" sz="1000" dirty="0">
+                <a:solidFill>
+                  <a:srgbClr val="0E2B44"/>
+                </a:solidFill>
+                <a:latin typeface="Aptos"/>
+              </a:rPr>
+              <a:t>Entwicklung Testmethodik (z.B. IEC 62443, NIST 800-115)</a:t>
+            </a:r>
+          </a:p>
+          <a:p>
+            <a:pPr marL="171450" indent="-171450" algn="l">
+              <a:spcBef>
+                <a:spcPts val="400"/>
+              </a:spcBef>
+              <a:buChar char="•"/>
+            </a:pPr>
+            <a:r>
+              <a:rPr lang="de-DE" sz="1000" dirty="0">
+                <a:solidFill>
+                  <a:srgbClr val="0E2B44"/>
+                </a:solidFill>
+                <a:latin typeface="Aptos"/>
+              </a:rPr>
+              <a:t>Praktische Umsetzung und Evaluierung</a:t>
             </a:r>
           </a:p>
         </p:txBody>
@@ -7214,4 +7330,10 @@
     </a:ext>
   </a:extLst>
 </a:theme>
+</file>
+
+<file path=docMetadata/LabelInfo.xml><?xml version="1.0" encoding="utf-8"?>
+<clbl:labelList xmlns:clbl="http://schemas.microsoft.com/office/2020/mipLabelMetadata">
+  <clbl:label id="{b560418e-b22f-4b2a-8a3e-eee5cd096ea8}" enabled="1" method="Privileged" siteId="{2782ef14-4849-46b4-b90d-d7e83fc425ca}" removed="0"/>
+</clbl:labelList>
 </file>